--- a/slides/ARC3133_Class03.pptx
+++ b/slides/ARC3133_Class03.pptx
@@ -3179,7 +3179,7 @@
                 </a:solidFill>
                 <a:latin typeface="Arial"/>
               </a:rPr>
-              <a:t>CLASS 03  /  SEP 8  /  U03</a:t>
+              <a:t>CLASS 03  /  SEP 8</a:t>
             </a:r>
           </a:p>
         </p:txBody>
@@ -5015,7 +5015,7 @@
         </p:nvSpPr>
         <p:spPr>
           <a:xfrm>
-            <a:off x="662940" y="3067812"/>
+            <a:off x="662940" y="2994660"/>
             <a:ext cx="621792" cy="566928"/>
           </a:xfrm>
           <a:prstGeom prst="rect">
@@ -5059,7 +5059,7 @@
         </p:nvSpPr>
         <p:spPr>
           <a:xfrm>
-            <a:off x="594360" y="2999232"/>
+            <a:off x="594360" y="2926080"/>
             <a:ext cx="621792" cy="566928"/>
           </a:xfrm>
           <a:prstGeom prst="rect">
@@ -5103,7 +5103,7 @@
         </p:nvSpPr>
         <p:spPr>
           <a:xfrm>
-            <a:off x="594360" y="3182112"/>
+            <a:off x="594360" y="3108960"/>
             <a:ext cx="621792" cy="274320"/>
           </a:xfrm>
           <a:prstGeom prst="rect">
@@ -5138,7 +5138,7 @@
         </p:nvSpPr>
         <p:spPr>
           <a:xfrm>
-            <a:off x="1559051" y="3067812"/>
+            <a:off x="1559051" y="2994660"/>
             <a:ext cx="10076688" cy="566928"/>
           </a:xfrm>
           <a:prstGeom prst="rect">
@@ -5182,7 +5182,7 @@
         </p:nvSpPr>
         <p:spPr>
           <a:xfrm>
-            <a:off x="1490472" y="2999232"/>
+            <a:off x="1490472" y="2926080"/>
             <a:ext cx="10076688" cy="566928"/>
           </a:xfrm>
           <a:prstGeom prst="rect">
@@ -5226,7 +5226,7 @@
         </p:nvSpPr>
         <p:spPr>
           <a:xfrm>
-            <a:off x="1764792" y="2999232"/>
+            <a:off x="1764792" y="2926080"/>
             <a:ext cx="9528048" cy="566928"/>
           </a:xfrm>
           <a:prstGeom prst="rect">
@@ -5261,7 +5261,7 @@
         </p:nvSpPr>
         <p:spPr>
           <a:xfrm>
-            <a:off x="662940" y="3781044"/>
+            <a:off x="662940" y="3634740"/>
             <a:ext cx="621792" cy="566928"/>
           </a:xfrm>
           <a:prstGeom prst="rect">
@@ -5305,7 +5305,7 @@
         </p:nvSpPr>
         <p:spPr>
           <a:xfrm>
-            <a:off x="594360" y="3712464"/>
+            <a:off x="594360" y="3566160"/>
             <a:ext cx="621792" cy="566928"/>
           </a:xfrm>
           <a:prstGeom prst="rect">
@@ -5349,7 +5349,7 @@
         </p:nvSpPr>
         <p:spPr>
           <a:xfrm>
-            <a:off x="594360" y="3895344"/>
+            <a:off x="594360" y="3749040"/>
             <a:ext cx="621792" cy="274320"/>
           </a:xfrm>
           <a:prstGeom prst="rect">
@@ -5384,7 +5384,7 @@
         </p:nvSpPr>
         <p:spPr>
           <a:xfrm>
-            <a:off x="1559051" y="3781044"/>
+            <a:off x="1559051" y="3634740"/>
             <a:ext cx="10076688" cy="566928"/>
           </a:xfrm>
           <a:prstGeom prst="rect">
@@ -5428,7 +5428,7 @@
         </p:nvSpPr>
         <p:spPr>
           <a:xfrm>
-            <a:off x="1490472" y="3712464"/>
+            <a:off x="1490472" y="3566160"/>
             <a:ext cx="10076688" cy="566928"/>
           </a:xfrm>
           <a:prstGeom prst="rect">
@@ -5472,7 +5472,7 @@
         </p:nvSpPr>
         <p:spPr>
           <a:xfrm>
-            <a:off x="1764792" y="3712464"/>
+            <a:off x="1764792" y="3566160"/>
             <a:ext cx="9528048" cy="566928"/>
           </a:xfrm>
           <a:prstGeom prst="rect">
@@ -5507,7 +5507,7 @@
         </p:nvSpPr>
         <p:spPr>
           <a:xfrm>
-            <a:off x="662940" y="4494276"/>
+            <a:off x="662940" y="4274820"/>
             <a:ext cx="621792" cy="566928"/>
           </a:xfrm>
           <a:prstGeom prst="rect">
@@ -5551,7 +5551,7 @@
         </p:nvSpPr>
         <p:spPr>
           <a:xfrm>
-            <a:off x="594360" y="4425696"/>
+            <a:off x="594360" y="4206240"/>
             <a:ext cx="621792" cy="566928"/>
           </a:xfrm>
           <a:prstGeom prst="rect">
@@ -5595,7 +5595,7 @@
         </p:nvSpPr>
         <p:spPr>
           <a:xfrm>
-            <a:off x="594360" y="4608576"/>
+            <a:off x="594360" y="4389120"/>
             <a:ext cx="621792" cy="274320"/>
           </a:xfrm>
           <a:prstGeom prst="rect">
@@ -5630,7 +5630,7 @@
         </p:nvSpPr>
         <p:spPr>
           <a:xfrm>
-            <a:off x="1559051" y="4494276"/>
+            <a:off x="1559051" y="4274820"/>
             <a:ext cx="10076688" cy="566928"/>
           </a:xfrm>
           <a:prstGeom prst="rect">
@@ -5674,7 +5674,7 @@
         </p:nvSpPr>
         <p:spPr>
           <a:xfrm>
-            <a:off x="1490472" y="4425696"/>
+            <a:off x="1490472" y="4206240"/>
             <a:ext cx="10076688" cy="566928"/>
           </a:xfrm>
           <a:prstGeom prst="rect">
@@ -5718,7 +5718,7 @@
         </p:nvSpPr>
         <p:spPr>
           <a:xfrm>
-            <a:off x="1764792" y="4425696"/>
+            <a:off x="1764792" y="4206240"/>
             <a:ext cx="9528048" cy="566928"/>
           </a:xfrm>
           <a:prstGeom prst="rect">
@@ -5753,7 +5753,7 @@
         </p:nvSpPr>
         <p:spPr>
           <a:xfrm>
-            <a:off x="662940" y="5207508"/>
+            <a:off x="662940" y="4914900"/>
             <a:ext cx="621792" cy="566928"/>
           </a:xfrm>
           <a:prstGeom prst="rect">
@@ -5797,7 +5797,7 @@
         </p:nvSpPr>
         <p:spPr>
           <a:xfrm>
-            <a:off x="594360" y="5138928"/>
+            <a:off x="594360" y="4846320"/>
             <a:ext cx="621792" cy="566928"/>
           </a:xfrm>
           <a:prstGeom prst="rect">
@@ -5841,7 +5841,7 @@
         </p:nvSpPr>
         <p:spPr>
           <a:xfrm>
-            <a:off x="594360" y="5321808"/>
+            <a:off x="594360" y="5029200"/>
             <a:ext cx="621792" cy="274320"/>
           </a:xfrm>
           <a:prstGeom prst="rect">
@@ -5876,7 +5876,7 @@
         </p:nvSpPr>
         <p:spPr>
           <a:xfrm>
-            <a:off x="1559051" y="5207508"/>
+            <a:off x="1559051" y="4914900"/>
             <a:ext cx="10076688" cy="566928"/>
           </a:xfrm>
           <a:prstGeom prst="rect">
@@ -5920,7 +5920,7 @@
         </p:nvSpPr>
         <p:spPr>
           <a:xfrm>
-            <a:off x="1490472" y="5138928"/>
+            <a:off x="1490472" y="4846320"/>
             <a:ext cx="10076688" cy="566928"/>
           </a:xfrm>
           <a:prstGeom prst="rect">
@@ -5964,7 +5964,7 @@
         </p:nvSpPr>
         <p:spPr>
           <a:xfrm>
-            <a:off x="1764792" y="5138928"/>
+            <a:off x="1764792" y="4846320"/>
             <a:ext cx="9528048" cy="566928"/>
           </a:xfrm>
           <a:prstGeom prst="rect">
@@ -5999,6 +5999,252 @@
         </p:nvSpPr>
         <p:spPr>
           <a:xfrm>
+            <a:off x="662940" y="5554980"/>
+            <a:ext cx="621792" cy="566928"/>
+          </a:xfrm>
+          <a:prstGeom prst="rect">
+            <a:avLst/>
+          </a:prstGeom>
+          <a:solidFill>
+            <a:srgbClr val="000000"/>
+          </a:solidFill>
+          <a:ln w="6350">
+            <a:solidFill>
+              <a:srgbClr val="000000"/>
+            </a:solidFill>
+          </a:ln>
+          <a:effectLst/>
+        </p:spPr>
+        <p:style>
+          <a:lnRef idx="1">
+            <a:schemeClr val="accent1"/>
+          </a:lnRef>
+          <a:fillRef idx="3">
+            <a:schemeClr val="accent1"/>
+          </a:fillRef>
+          <a:effectRef idx="2">
+            <a:schemeClr val="accent1"/>
+          </a:effectRef>
+          <a:fontRef idx="minor">
+            <a:schemeClr val="lt1"/>
+          </a:fontRef>
+        </p:style>
+        <p:txBody>
+          <a:bodyPr rtlCol="0" anchor="ctr"/>
+          <a:lstStyle/>
+          <a:p/>
+        </p:txBody>
+      </p:sp>
+      <p:sp>
+        <p:nvSpPr>
+          <p:cNvPr id="36" name="Rectangle 35"/>
+          <p:cNvSpPr/>
+          <p:nvPr/>
+        </p:nvSpPr>
+        <p:spPr>
+          <a:xfrm>
+            <a:off x="594360" y="5486400"/>
+            <a:ext cx="621792" cy="566928"/>
+          </a:xfrm>
+          <a:prstGeom prst="rect">
+            <a:avLst/>
+          </a:prstGeom>
+          <a:solidFill>
+            <a:srgbClr val="FFFDF7"/>
+          </a:solidFill>
+          <a:ln w="34925">
+            <a:solidFill>
+              <a:srgbClr val="000000"/>
+            </a:solidFill>
+          </a:ln>
+          <a:effectLst/>
+        </p:spPr>
+        <p:style>
+          <a:lnRef idx="1">
+            <a:schemeClr val="accent1"/>
+          </a:lnRef>
+          <a:fillRef idx="3">
+            <a:schemeClr val="accent1"/>
+          </a:fillRef>
+          <a:effectRef idx="2">
+            <a:schemeClr val="accent1"/>
+          </a:effectRef>
+          <a:fontRef idx="minor">
+            <a:schemeClr val="lt1"/>
+          </a:fontRef>
+        </p:style>
+        <p:txBody>
+          <a:bodyPr rtlCol="0" anchor="ctr"/>
+          <a:lstStyle/>
+          <a:p/>
+        </p:txBody>
+      </p:sp>
+      <p:sp>
+        <p:nvSpPr>
+          <p:cNvPr id="37" name="TextBox 36"/>
+          <p:cNvSpPr txBox="1"/>
+          <p:nvPr/>
+        </p:nvSpPr>
+        <p:spPr>
+          <a:xfrm>
+            <a:off x="594360" y="5669280"/>
+            <a:ext cx="621792" cy="274320"/>
+          </a:xfrm>
+          <a:prstGeom prst="rect">
+            <a:avLst/>
+          </a:prstGeom>
+          <a:noFill/>
+        </p:spPr>
+        <p:txBody>
+          <a:bodyPr wrap="square" lIns="0" rIns="0" tIns="0" bIns="0" anchor="t">
+            <a:spAutoFit/>
+          </a:bodyPr>
+          <a:lstStyle/>
+          <a:p>
+            <a:pPr algn="ctr"/>
+            <a:r>
+              <a:rPr sz="1700" b="1">
+                <a:solidFill>
+                  <a:srgbClr val="000000"/>
+                </a:solidFill>
+                <a:latin typeface="Arial"/>
+              </a:rPr>
+              <a:t>✓</a:t>
+            </a:r>
+          </a:p>
+        </p:txBody>
+      </p:sp>
+      <p:sp>
+        <p:nvSpPr>
+          <p:cNvPr id="38" name="Rectangle 37"/>
+          <p:cNvSpPr/>
+          <p:nvPr/>
+        </p:nvSpPr>
+        <p:spPr>
+          <a:xfrm>
+            <a:off x="1559051" y="5554980"/>
+            <a:ext cx="10076688" cy="566928"/>
+          </a:xfrm>
+          <a:prstGeom prst="rect">
+            <a:avLst/>
+          </a:prstGeom>
+          <a:solidFill>
+            <a:srgbClr val="000000"/>
+          </a:solidFill>
+          <a:ln w="6350">
+            <a:solidFill>
+              <a:srgbClr val="000000"/>
+            </a:solidFill>
+          </a:ln>
+          <a:effectLst/>
+        </p:spPr>
+        <p:style>
+          <a:lnRef idx="1">
+            <a:schemeClr val="accent1"/>
+          </a:lnRef>
+          <a:fillRef idx="3">
+            <a:schemeClr val="accent1"/>
+          </a:fillRef>
+          <a:effectRef idx="2">
+            <a:schemeClr val="accent1"/>
+          </a:effectRef>
+          <a:fontRef idx="minor">
+            <a:schemeClr val="lt1"/>
+          </a:fontRef>
+        </p:style>
+        <p:txBody>
+          <a:bodyPr rtlCol="0" anchor="ctr"/>
+          <a:lstStyle/>
+          <a:p/>
+        </p:txBody>
+      </p:sp>
+      <p:sp>
+        <p:nvSpPr>
+          <p:cNvPr id="39" name="Rectangle 38"/>
+          <p:cNvSpPr/>
+          <p:nvPr/>
+        </p:nvSpPr>
+        <p:spPr>
+          <a:xfrm>
+            <a:off x="1490472" y="5486400"/>
+            <a:ext cx="10076688" cy="566928"/>
+          </a:xfrm>
+          <a:prstGeom prst="rect">
+            <a:avLst/>
+          </a:prstGeom>
+          <a:solidFill>
+            <a:srgbClr val="FFFDF7"/>
+          </a:solidFill>
+          <a:ln w="34925">
+            <a:solidFill>
+              <a:srgbClr val="000000"/>
+            </a:solidFill>
+          </a:ln>
+          <a:effectLst/>
+        </p:spPr>
+        <p:style>
+          <a:lnRef idx="1">
+            <a:schemeClr val="accent1"/>
+          </a:lnRef>
+          <a:fillRef idx="3">
+            <a:schemeClr val="accent1"/>
+          </a:fillRef>
+          <a:effectRef idx="2">
+            <a:schemeClr val="accent1"/>
+          </a:effectRef>
+          <a:fontRef idx="minor">
+            <a:schemeClr val="lt1"/>
+          </a:fontRef>
+        </p:style>
+        <p:txBody>
+          <a:bodyPr rtlCol="0" anchor="ctr"/>
+          <a:lstStyle/>
+          <a:p/>
+        </p:txBody>
+      </p:sp>
+      <p:sp>
+        <p:nvSpPr>
+          <p:cNvPr id="40" name="TextBox 39"/>
+          <p:cNvSpPr txBox="1"/>
+          <p:nvPr/>
+        </p:nvSpPr>
+        <p:spPr>
+          <a:xfrm>
+            <a:off x="1764792" y="5486400"/>
+            <a:ext cx="9528048" cy="566928"/>
+          </a:xfrm>
+          <a:prstGeom prst="rect">
+            <a:avLst/>
+          </a:prstGeom>
+          <a:noFill/>
+        </p:spPr>
+        <p:txBody>
+          <a:bodyPr wrap="square" lIns="0" rIns="0" tIns="0" bIns="0" anchor="ctr">
+            <a:spAutoFit/>
+          </a:bodyPr>
+          <a:lstStyle/>
+          <a:p>
+            <a:pPr algn="l"/>
+            <a:r>
+              <a:rPr sz="1450">
+                <a:solidFill>
+                  <a:srgbClr val="000000"/>
+                </a:solidFill>
+                <a:latin typeface="Calibri"/>
+              </a:rPr>
+              <a:t>Your own panel named, and the numbers that will drive it written down</a:t>
+            </a:r>
+          </a:p>
+        </p:txBody>
+      </p:sp>
+      <p:sp>
+        <p:nvSpPr>
+          <p:cNvPr id="41" name="Rectangle 40"/>
+          <p:cNvSpPr/>
+          <p:nvPr/>
+        </p:nvSpPr>
+        <p:spPr>
+          <a:xfrm>
             <a:off x="662940" y="6012180"/>
             <a:ext cx="8412480" cy="566928"/>
           </a:xfrm>
@@ -6037,7 +6283,7 @@
       </p:sp>
       <p:sp>
         <p:nvSpPr>
-          <p:cNvPr id="36" name="Rectangle 35"/>
+          <p:cNvPr id="42" name="Rectangle 41"/>
           <p:cNvSpPr/>
           <p:nvPr/>
         </p:nvSpPr>
@@ -6081,7 +6327,7 @@
       </p:sp>
       <p:sp>
         <p:nvSpPr>
-          <p:cNvPr id="37" name="TextBox 36"/>
+          <p:cNvPr id="43" name="TextBox 42"/>
           <p:cNvSpPr txBox="1"/>
           <p:nvPr/>
         </p:nvSpPr>
@@ -6714,7 +6960,7 @@
                 </a:solidFill>
                 <a:latin typeface="Calibri"/>
               </a:rPr>
-              <a:t>P1a is due next class: the ordered diagram, the final axonometric and three variants.</a:t>
+              <a:t>P1a is due next class: eight or nine numbered diagrams, the last one developed at building scale with a figure and planting, and the sequence written as pseudocode.</a:t>
             </a:r>
           </a:p>
         </p:txBody>
@@ -6837,7 +7083,7 @@
                 </a:solidFill>
                 <a:latin typeface="Arial"/>
               </a:rPr>
-              <a:t>BRING</a:t>
+              <a:t>FIND</a:t>
             </a:r>
           </a:p>
         </p:txBody>
@@ -6964,7 +7210,7 @@
                 </a:solidFill>
                 <a:latin typeface="Calibri"/>
               </a:rPr>
-              <a:t>Your pyramid, parametric and closed. Next week it becomes the component that gets repeated, so bring a file you can build on.</a:t>
+              <a:t>The panel. One building, one repeating component, simple enough to write as two lists, and it has to sit beside itself without a gap. Name the building and your source, and bring its point and face lists started - next week it gets repeated.</a:t>
             </a:r>
           </a:p>
         </p:txBody>
@@ -13870,7 +14116,7 @@
                 </a:solidFill>
                 <a:latin typeface="Arial"/>
               </a:rPr>
-              <a:t>P1b — MESH FROM SCRATCH</a:t>
+              <a:t>P1b — PANEL FROM SCRATCH</a:t>
             </a:r>
           </a:p>
         </p:txBody>
@@ -13988,7 +14234,7 @@
                 </a:solidFill>
                 <a:latin typeface="Calibri"/>
               </a:rPr>
-              <a:t>Build the solid from its parts, then take it back to the massing study and let it do work there. One sheet covers the whole ladder — point, line, edge, face, mesh — and ends with an annotated closed pyramid.</a:t>
+              <a:t>Find a panel in a building you like, keep it simple, and build it out of two lists - points and faces. It is the component you will array in P2 and the object you will print, so choose something that tiles.</a:t>
             </a:r>
           </a:p>
         </p:txBody>
@@ -14002,7 +14248,7 @@
         <p:spPr>
           <a:xfrm>
             <a:off x="662940" y="3680460"/>
-            <a:ext cx="3517391" cy="411480"/>
+            <a:ext cx="2585466" cy="411480"/>
           </a:xfrm>
           <a:prstGeom prst="rect">
             <a:avLst/>
@@ -14046,7 +14292,7 @@
         <p:spPr>
           <a:xfrm>
             <a:off x="594360" y="3611880"/>
-            <a:ext cx="3517391" cy="411480"/>
+            <a:ext cx="2585466" cy="411480"/>
           </a:xfrm>
           <a:prstGeom prst="rect">
             <a:avLst/>
@@ -14090,7 +14336,7 @@
         <p:spPr>
           <a:xfrm>
             <a:off x="594360" y="3717036"/>
-            <a:ext cx="3517391" cy="274320"/>
+            <a:ext cx="2585466" cy="274320"/>
           </a:xfrm>
           <a:prstGeom prst="rect">
             <a:avLst/>
@@ -14111,7 +14357,7 @@
                 </a:solidFill>
                 <a:latin typeface="Arial"/>
               </a:rPr>
-              <a:t>SHOW</a:t>
+              <a:t>FIND</a:t>
             </a:r>
           </a:p>
         </p:txBody>
@@ -14125,7 +14371,7 @@
         <p:spPr>
           <a:xfrm>
             <a:off x="662940" y="4183380"/>
-            <a:ext cx="3517391" cy="1463040"/>
+            <a:ext cx="2585466" cy="1463040"/>
           </a:xfrm>
           <a:prstGeom prst="rect">
             <a:avLst/>
@@ -14169,7 +14415,7 @@
         <p:spPr>
           <a:xfrm>
             <a:off x="594360" y="4114800"/>
-            <a:ext cx="3517391" cy="1463040"/>
+            <a:ext cx="2585466" cy="1463040"/>
           </a:xfrm>
           <a:prstGeom prst="rect">
             <a:avLst/>
@@ -14213,7 +14459,7 @@
         <p:spPr>
           <a:xfrm>
             <a:off x="850392" y="4279392"/>
-            <a:ext cx="3005327" cy="320040"/>
+            <a:ext cx="2073402" cy="320040"/>
           </a:xfrm>
           <a:prstGeom prst="rect">
             <a:avLst/>
@@ -14234,7 +14480,7 @@
                 </a:solidFill>
                 <a:latin typeface="Arial"/>
               </a:rPr>
-              <a:t>THE LADDER</a:t>
+              <a:t>A PANEL</a:t>
             </a:r>
           </a:p>
         </p:txBody>
@@ -14248,7 +14494,7 @@
         <p:spPr>
           <a:xfrm>
             <a:off x="850392" y="4663440"/>
-            <a:ext cx="3005327" cy="822960"/>
+            <a:ext cx="2073402" cy="822960"/>
           </a:xfrm>
           <a:prstGeom prst="rect">
             <a:avLst/>
@@ -14273,7 +14519,7 @@
                 </a:solidFill>
                 <a:latin typeface="Calibri"/>
               </a:rPr>
-              <a:t>Point, line, edge, face, and the multiple-face exercise.</a:t>
+              <a:t>One precedent, simple. It has to sit beside itself and close.</a:t>
             </a:r>
           </a:p>
         </p:txBody>
@@ -14286,8 +14532,8 @@
         </p:nvSpPr>
         <p:spPr>
           <a:xfrm>
-            <a:off x="4390644" y="3680460"/>
-            <a:ext cx="3517391" cy="411480"/>
+            <a:off x="3458718" y="3680460"/>
+            <a:ext cx="2585466" cy="411480"/>
           </a:xfrm>
           <a:prstGeom prst="rect">
             <a:avLst/>
@@ -14330,8 +14576,8 @@
         </p:nvSpPr>
         <p:spPr>
           <a:xfrm>
-            <a:off x="4322064" y="3611880"/>
-            <a:ext cx="3517391" cy="411480"/>
+            <a:off x="3390138" y="3611880"/>
+            <a:ext cx="2585466" cy="411480"/>
           </a:xfrm>
           <a:prstGeom prst="rect">
             <a:avLst/>
@@ -14374,8 +14620,8 @@
         </p:nvSpPr>
         <p:spPr>
           <a:xfrm>
-            <a:off x="4322064" y="3717036"/>
-            <a:ext cx="3517391" cy="274320"/>
+            <a:off x="3390138" y="3717036"/>
+            <a:ext cx="2585466" cy="274320"/>
           </a:xfrm>
           <a:prstGeom prst="rect">
             <a:avLst/>
@@ -14396,7 +14642,7 @@
                 </a:solidFill>
                 <a:latin typeface="Arial"/>
               </a:rPr>
-              <a:t>BUILD</a:t>
+              <a:t>DECIDE</a:t>
             </a:r>
           </a:p>
         </p:txBody>
@@ -14409,8 +14655,8 @@
         </p:nvSpPr>
         <p:spPr>
           <a:xfrm>
-            <a:off x="4390644" y="4183380"/>
-            <a:ext cx="3517391" cy="1463040"/>
+            <a:off x="3458718" y="4183380"/>
+            <a:ext cx="2585466" cy="1463040"/>
           </a:xfrm>
           <a:prstGeom prst="rect">
             <a:avLst/>
@@ -14453,8 +14699,8 @@
         </p:nvSpPr>
         <p:spPr>
           <a:xfrm>
-            <a:off x="4322064" y="4114800"/>
-            <a:ext cx="3517391" cy="1463040"/>
+            <a:off x="3390138" y="4114800"/>
+            <a:ext cx="2585466" cy="1463040"/>
           </a:xfrm>
           <a:prstGeom prst="rect">
             <a:avLst/>
@@ -14497,8 +14743,8 @@
         </p:nvSpPr>
         <p:spPr>
           <a:xfrm>
-            <a:off x="4578096" y="4279392"/>
-            <a:ext cx="3005327" cy="320040"/>
+            <a:off x="3646170" y="4279392"/>
+            <a:ext cx="2073402" cy="320040"/>
           </a:xfrm>
           <a:prstGeom prst="rect">
             <a:avLst/>
@@ -14519,7 +14765,7 @@
                 </a:solidFill>
                 <a:latin typeface="Arial"/>
               </a:rPr>
-              <a:t>THE PYRAMID</a:t>
+              <a:t>WHAT MOVES</a:t>
             </a:r>
           </a:p>
         </p:txBody>
@@ -14532,8 +14778,8 @@
         </p:nvSpPr>
         <p:spPr>
           <a:xfrm>
-            <a:off x="4578096" y="4663440"/>
-            <a:ext cx="3005327" cy="822960"/>
+            <a:off x="3646170" y="4663440"/>
+            <a:ext cx="2073402" cy="822960"/>
           </a:xfrm>
           <a:prstGeom prst="rect">
             <a:avLst/>
@@ -14558,7 +14804,7 @@
                 </a:solidFill>
                 <a:latin typeface="Calibri"/>
               </a:rPr>
-              <a:t>Width, Depth and Height exposed. Four sides and a base.</a:t>
+              <a:t>The parameters, first. One has to change its shape, not its box.</a:t>
             </a:r>
           </a:p>
         </p:txBody>
@@ -14571,8 +14817,8 @@
         </p:nvSpPr>
         <p:spPr>
           <a:xfrm>
-            <a:off x="8118347" y="3680460"/>
-            <a:ext cx="3517391" cy="411480"/>
+            <a:off x="6254496" y="3680460"/>
+            <a:ext cx="2585466" cy="411480"/>
           </a:xfrm>
           <a:prstGeom prst="rect">
             <a:avLst/>
@@ -14615,8 +14861,8 @@
         </p:nvSpPr>
         <p:spPr>
           <a:xfrm>
-            <a:off x="8049767" y="3611880"/>
-            <a:ext cx="3517391" cy="411480"/>
+            <a:off x="6185916" y="3611880"/>
+            <a:ext cx="2585466" cy="411480"/>
           </a:xfrm>
           <a:prstGeom prst="rect">
             <a:avLst/>
@@ -14659,8 +14905,8 @@
         </p:nvSpPr>
         <p:spPr>
           <a:xfrm>
-            <a:off x="8049767" y="3717036"/>
-            <a:ext cx="3517391" cy="274320"/>
+            <a:off x="6185916" y="3717036"/>
+            <a:ext cx="2585466" cy="274320"/>
           </a:xfrm>
           <a:prstGeom prst="rect">
             <a:avLst/>
@@ -14681,7 +14927,7 @@
                 </a:solidFill>
                 <a:latin typeface="Arial"/>
               </a:rPr>
-              <a:t>REUSE</a:t>
+              <a:t>BUILD</a:t>
             </a:r>
           </a:p>
         </p:txBody>
@@ -14694,8 +14940,8 @@
         </p:nvSpPr>
         <p:spPr>
           <a:xfrm>
-            <a:off x="8118347" y="4183380"/>
-            <a:ext cx="3517391" cy="1463040"/>
+            <a:off x="6254496" y="4183380"/>
+            <a:ext cx="2585466" cy="1463040"/>
           </a:xfrm>
           <a:prstGeom prst="rect">
             <a:avLst/>
@@ -14738,8 +14984,8 @@
         </p:nvSpPr>
         <p:spPr>
           <a:xfrm>
-            <a:off x="8049767" y="4114800"/>
-            <a:ext cx="3517391" cy="1463040"/>
+            <a:off x="6185916" y="4114800"/>
+            <a:ext cx="2585466" cy="1463040"/>
           </a:xfrm>
           <a:prstGeom prst="rect">
             <a:avLst/>
@@ -14782,8 +15028,8 @@
         </p:nvSpPr>
         <p:spPr>
           <a:xfrm>
-            <a:off x="8305799" y="4279392"/>
-            <a:ext cx="3005327" cy="320040"/>
+            <a:off x="6441948" y="4279392"/>
+            <a:ext cx="2073402" cy="320040"/>
           </a:xfrm>
           <a:prstGeom prst="rect">
             <a:avLst/>
@@ -14804,7 +15050,7 @@
                 </a:solidFill>
                 <a:latin typeface="Arial"/>
               </a:rPr>
-              <a:t>AS A CUTTER</a:t>
+              <a:t>FROM TWO LISTS</a:t>
             </a:r>
           </a:p>
         </p:txBody>
@@ -14817,8 +15063,8 @@
         </p:nvSpPr>
         <p:spPr>
           <a:xfrm>
-            <a:off x="8305799" y="4663440"/>
-            <a:ext cx="3005327" cy="822960"/>
+            <a:off x="6441948" y="4663440"/>
+            <a:ext cx="2073402" cy="822960"/>
           </a:xfrm>
           <a:prstGeom prst="rect">
             <a:avLst/>
@@ -14843,7 +15089,292 @@
                 </a:solidFill>
                 <a:latin typeface="Calibri"/>
               </a:rPr>
-              <a:t>Back into the P1a study, at three parameter settings.</a:t>
+              <a:t>Every point an expression of those numbers. Never a typed coordinate.</a:t>
+            </a:r>
+          </a:p>
+        </p:txBody>
+      </p:sp>
+      <p:sp>
+        <p:nvSpPr>
+          <p:cNvPr id="30" name="Rectangle 29"/>
+          <p:cNvSpPr/>
+          <p:nvPr/>
+        </p:nvSpPr>
+        <p:spPr>
+          <a:xfrm>
+            <a:off x="9050274" y="3680460"/>
+            <a:ext cx="2585466" cy="411480"/>
+          </a:xfrm>
+          <a:prstGeom prst="rect">
+            <a:avLst/>
+          </a:prstGeom>
+          <a:solidFill>
+            <a:srgbClr val="000000"/>
+          </a:solidFill>
+          <a:ln w="6350">
+            <a:solidFill>
+              <a:srgbClr val="000000"/>
+            </a:solidFill>
+          </a:ln>
+          <a:effectLst/>
+        </p:spPr>
+        <p:style>
+          <a:lnRef idx="1">
+            <a:schemeClr val="accent1"/>
+          </a:lnRef>
+          <a:fillRef idx="3">
+            <a:schemeClr val="accent1"/>
+          </a:fillRef>
+          <a:effectRef idx="2">
+            <a:schemeClr val="accent1"/>
+          </a:effectRef>
+          <a:fontRef idx="minor">
+            <a:schemeClr val="lt1"/>
+          </a:fontRef>
+        </p:style>
+        <p:txBody>
+          <a:bodyPr rtlCol="0" anchor="ctr"/>
+          <a:lstStyle/>
+          <a:p/>
+        </p:txBody>
+      </p:sp>
+      <p:sp>
+        <p:nvSpPr>
+          <p:cNvPr id="31" name="Rectangle 30"/>
+          <p:cNvSpPr/>
+          <p:nvPr/>
+        </p:nvSpPr>
+        <p:spPr>
+          <a:xfrm>
+            <a:off x="8981694" y="3611880"/>
+            <a:ext cx="2585466" cy="411480"/>
+          </a:xfrm>
+          <a:prstGeom prst="rect">
+            <a:avLst/>
+          </a:prstGeom>
+          <a:solidFill>
+            <a:srgbClr val="FF4D8D"/>
+          </a:solidFill>
+          <a:ln w="34925">
+            <a:solidFill>
+              <a:srgbClr val="000000"/>
+            </a:solidFill>
+          </a:ln>
+          <a:effectLst/>
+        </p:spPr>
+        <p:style>
+          <a:lnRef idx="1">
+            <a:schemeClr val="accent1"/>
+          </a:lnRef>
+          <a:fillRef idx="3">
+            <a:schemeClr val="accent1"/>
+          </a:fillRef>
+          <a:effectRef idx="2">
+            <a:schemeClr val="accent1"/>
+          </a:effectRef>
+          <a:fontRef idx="minor">
+            <a:schemeClr val="lt1"/>
+          </a:fontRef>
+        </p:style>
+        <p:txBody>
+          <a:bodyPr rtlCol="0" anchor="ctr"/>
+          <a:lstStyle/>
+          <a:p/>
+        </p:txBody>
+      </p:sp>
+      <p:sp>
+        <p:nvSpPr>
+          <p:cNvPr id="32" name="TextBox 31"/>
+          <p:cNvSpPr txBox="1"/>
+          <p:nvPr/>
+        </p:nvSpPr>
+        <p:spPr>
+          <a:xfrm>
+            <a:off x="8981694" y="3717036"/>
+            <a:ext cx="2585466" cy="274320"/>
+          </a:xfrm>
+          <a:prstGeom prst="rect">
+            <a:avLst/>
+          </a:prstGeom>
+          <a:noFill/>
+        </p:spPr>
+        <p:txBody>
+          <a:bodyPr wrap="square" lIns="0" rIns="0" tIns="0" bIns="0" anchor="t">
+            <a:spAutoFit/>
+          </a:bodyPr>
+          <a:lstStyle/>
+          <a:p>
+            <a:pPr algn="ctr"/>
+            <a:r>
+              <a:rPr sz="1100" b="1">
+                <a:solidFill>
+                  <a:srgbClr val="000000"/>
+                </a:solidFill>
+                <a:latin typeface="Arial"/>
+              </a:rPr>
+              <a:t>SHOW</a:t>
+            </a:r>
+          </a:p>
+        </p:txBody>
+      </p:sp>
+      <p:sp>
+        <p:nvSpPr>
+          <p:cNvPr id="33" name="Rectangle 32"/>
+          <p:cNvSpPr/>
+          <p:nvPr/>
+        </p:nvSpPr>
+        <p:spPr>
+          <a:xfrm>
+            <a:off x="9050274" y="4183380"/>
+            <a:ext cx="2585466" cy="1463040"/>
+          </a:xfrm>
+          <a:prstGeom prst="rect">
+            <a:avLst/>
+          </a:prstGeom>
+          <a:solidFill>
+            <a:srgbClr val="000000"/>
+          </a:solidFill>
+          <a:ln w="6350">
+            <a:solidFill>
+              <a:srgbClr val="000000"/>
+            </a:solidFill>
+          </a:ln>
+          <a:effectLst/>
+        </p:spPr>
+        <p:style>
+          <a:lnRef idx="1">
+            <a:schemeClr val="accent1"/>
+          </a:lnRef>
+          <a:fillRef idx="3">
+            <a:schemeClr val="accent1"/>
+          </a:fillRef>
+          <a:effectRef idx="2">
+            <a:schemeClr val="accent1"/>
+          </a:effectRef>
+          <a:fontRef idx="minor">
+            <a:schemeClr val="lt1"/>
+          </a:fontRef>
+        </p:style>
+        <p:txBody>
+          <a:bodyPr rtlCol="0" anchor="ctr"/>
+          <a:lstStyle/>
+          <a:p/>
+        </p:txBody>
+      </p:sp>
+      <p:sp>
+        <p:nvSpPr>
+          <p:cNvPr id="34" name="Rectangle 33"/>
+          <p:cNvSpPr/>
+          <p:nvPr/>
+        </p:nvSpPr>
+        <p:spPr>
+          <a:xfrm>
+            <a:off x="8981694" y="4114800"/>
+            <a:ext cx="2585466" cy="1463040"/>
+          </a:xfrm>
+          <a:prstGeom prst="rect">
+            <a:avLst/>
+          </a:prstGeom>
+          <a:solidFill>
+            <a:srgbClr val="FFFDF7"/>
+          </a:solidFill>
+          <a:ln w="34925">
+            <a:solidFill>
+              <a:srgbClr val="000000"/>
+            </a:solidFill>
+          </a:ln>
+          <a:effectLst/>
+        </p:spPr>
+        <p:style>
+          <a:lnRef idx="1">
+            <a:schemeClr val="accent1"/>
+          </a:lnRef>
+          <a:fillRef idx="3">
+            <a:schemeClr val="accent1"/>
+          </a:fillRef>
+          <a:effectRef idx="2">
+            <a:schemeClr val="accent1"/>
+          </a:effectRef>
+          <a:fontRef idx="minor">
+            <a:schemeClr val="lt1"/>
+          </a:fontRef>
+        </p:style>
+        <p:txBody>
+          <a:bodyPr rtlCol="0" anchor="ctr"/>
+          <a:lstStyle/>
+          <a:p/>
+        </p:txBody>
+      </p:sp>
+      <p:sp>
+        <p:nvSpPr>
+          <p:cNvPr id="35" name="TextBox 34"/>
+          <p:cNvSpPr txBox="1"/>
+          <p:nvPr/>
+        </p:nvSpPr>
+        <p:spPr>
+          <a:xfrm>
+            <a:off x="9237726" y="4279392"/>
+            <a:ext cx="2073402" cy="320040"/>
+          </a:xfrm>
+          <a:prstGeom prst="rect">
+            <a:avLst/>
+          </a:prstGeom>
+          <a:noFill/>
+        </p:spPr>
+        <p:txBody>
+          <a:bodyPr wrap="square" lIns="0" rIns="0" tIns="0" bIns="0" anchor="t">
+            <a:spAutoFit/>
+          </a:bodyPr>
+          <a:lstStyle/>
+          <a:p>
+            <a:pPr algn="l"/>
+            <a:r>
+              <a:rPr sz="1400" b="1">
+                <a:solidFill>
+                  <a:srgbClr val="000000"/>
+                </a:solidFill>
+                <a:latin typeface="Arial"/>
+              </a:rPr>
+              <a:t>THE RANGE</a:t>
+            </a:r>
+          </a:p>
+        </p:txBody>
+      </p:sp>
+      <p:sp>
+        <p:nvSpPr>
+          <p:cNvPr id="36" name="TextBox 35"/>
+          <p:cNvSpPr txBox="1"/>
+          <p:nvPr/>
+        </p:nvSpPr>
+        <p:spPr>
+          <a:xfrm>
+            <a:off x="9237726" y="4663440"/>
+            <a:ext cx="2073402" cy="822960"/>
+          </a:xfrm>
+          <a:prstGeom prst="rect">
+            <a:avLst/>
+          </a:prstGeom>
+          <a:noFill/>
+        </p:spPr>
+        <p:txBody>
+          <a:bodyPr wrap="square" lIns="0" rIns="0" tIns="0" bIns="0" anchor="t">
+            <a:spAutoFit/>
+          </a:bodyPr>
+          <a:lstStyle/>
+          <a:p>
+            <a:pPr algn="l">
+              <a:lnSpc>
+                <a:spcPct val="125000"/>
+              </a:lnSpc>
+            </a:pPr>
+            <a:r>
+              <a:rPr sz="1250">
+                <a:solidFill>
+                  <a:srgbClr val="000000"/>
+                </a:solidFill>
+                <a:latin typeface="Calibri"/>
+              </a:rPr>
+              <a:t>Low, middle, high - still closing, still tiling. P2b drives it.</a:t>
             </a:r>
           </a:p>
         </p:txBody>
@@ -14997,7 +15528,7 @@
         <p:spPr>
           <a:xfrm>
             <a:off x="662940" y="1851660"/>
-            <a:ext cx="777240" cy="960120"/>
+            <a:ext cx="777240" cy="579120"/>
           </a:xfrm>
           <a:prstGeom prst="rect">
             <a:avLst/>
@@ -15041,7 +15572,7 @@
         <p:spPr>
           <a:xfrm>
             <a:off x="594360" y="1783080"/>
-            <a:ext cx="777240" cy="960120"/>
+            <a:ext cx="777240" cy="579120"/>
           </a:xfrm>
           <a:prstGeom prst="rect">
             <a:avLst/>
@@ -15084,7 +15615,7 @@
         </p:nvSpPr>
         <p:spPr>
           <a:xfrm>
-            <a:off x="594360" y="2162556"/>
+            <a:off x="594360" y="1972056"/>
             <a:ext cx="777240" cy="274320"/>
           </a:xfrm>
           <a:prstGeom prst="rect">
@@ -15120,7 +15651,7 @@
         <p:spPr>
           <a:xfrm>
             <a:off x="1714499" y="1851660"/>
-            <a:ext cx="9921240" cy="960120"/>
+            <a:ext cx="9921240" cy="579120"/>
           </a:xfrm>
           <a:prstGeom prst="rect">
             <a:avLst/>
@@ -15164,7 +15695,7 @@
         <p:spPr>
           <a:xfrm>
             <a:off x="1645919" y="1783080"/>
-            <a:ext cx="9921240" cy="960120"/>
+            <a:ext cx="9921240" cy="579120"/>
           </a:xfrm>
           <a:prstGeom prst="rect">
             <a:avLst/>
@@ -15208,7 +15739,7 @@
         <p:spPr>
           <a:xfrm>
             <a:off x="1920240" y="1874519"/>
-            <a:ext cx="9372600" cy="777240"/>
+            <a:ext cx="9372600" cy="396239"/>
           </a:xfrm>
           <a:prstGeom prst="rect">
             <a:avLst/>
@@ -15227,13 +15758,13 @@
               </a:lnSpc>
             </a:pPr>
             <a:r>
-              <a:rPr sz="1300">
+              <a:rPr sz="1200">
                 <a:solidFill>
                   <a:srgbClr val="000000"/>
                 </a:solidFill>
                 <a:latin typeface="Calibri"/>
               </a:rPr>
-              <a:t>One sheet showing point, line, edge, face and the multiple-face mesh exercise, with an annotated closed pyramid.</a:t>
+              <a:t>Find one panel in a built precedent and keep it simple. Choose it by one test: could you set it beside three copies of itself, edge to edge, and have the grid close? Name the building, the architect and your source on the sheet.</a:t>
             </a:r>
           </a:p>
         </p:txBody>
@@ -15246,8 +15777,8 @@
         </p:nvSpPr>
         <p:spPr>
           <a:xfrm>
-            <a:off x="662940" y="2958084"/>
-            <a:ext cx="777240" cy="960120"/>
+            <a:off x="662940" y="2577084"/>
+            <a:ext cx="777240" cy="579120"/>
           </a:xfrm>
           <a:prstGeom prst="rect">
             <a:avLst/>
@@ -15290,8 +15821,8 @@
         </p:nvSpPr>
         <p:spPr>
           <a:xfrm>
-            <a:off x="594360" y="2889504"/>
-            <a:ext cx="777240" cy="960120"/>
+            <a:off x="594360" y="2508504"/>
+            <a:ext cx="777240" cy="579120"/>
           </a:xfrm>
           <a:prstGeom prst="rect">
             <a:avLst/>
@@ -15334,7 +15865,7 @@
         </p:nvSpPr>
         <p:spPr>
           <a:xfrm>
-            <a:off x="594360" y="3268980"/>
+            <a:off x="594360" y="2697479"/>
             <a:ext cx="777240" cy="274320"/>
           </a:xfrm>
           <a:prstGeom prst="rect">
@@ -15369,8 +15900,8 @@
         </p:nvSpPr>
         <p:spPr>
           <a:xfrm>
-            <a:off x="1714499" y="2958084"/>
-            <a:ext cx="9921240" cy="960120"/>
+            <a:off x="1714499" y="2577084"/>
+            <a:ext cx="9921240" cy="579120"/>
           </a:xfrm>
           <a:prstGeom prst="rect">
             <a:avLst/>
@@ -15413,8 +15944,8 @@
         </p:nvSpPr>
         <p:spPr>
           <a:xfrm>
-            <a:off x="1645919" y="2889504"/>
-            <a:ext cx="9921240" cy="960120"/>
+            <a:off x="1645919" y="2508504"/>
+            <a:ext cx="9921240" cy="579120"/>
           </a:xfrm>
           <a:prstGeom prst="rect">
             <a:avLst/>
@@ -15457,8 +15988,8 @@
         </p:nvSpPr>
         <p:spPr>
           <a:xfrm>
-            <a:off x="1920240" y="2980944"/>
-            <a:ext cx="9372600" cy="777240"/>
+            <a:off x="1920240" y="2599944"/>
+            <a:ext cx="9372600" cy="396239"/>
           </a:xfrm>
           <a:prstGeom prst="rect">
             <a:avLst/>
@@ -15477,13 +16008,13 @@
               </a:lnSpc>
             </a:pPr>
             <a:r>
-              <a:rPr sz="1300">
+              <a:rPr sz="1200">
                 <a:solidFill>
                   <a:srgbClr val="000000"/>
                 </a:solidFill>
                 <a:latin typeface="Calibri"/>
               </a:rPr>
-              <a:t>Build four base corners and an apex with Width, Depth and Height exposed; include all four side faces and the base.</a:t>
+              <a:t>Decide the parameters before you model anything, and say in one line what each does. At least one must change the panel's shape — an aperture, a fold depth, a corner offset — not its bounding box.</a:t>
             </a:r>
           </a:p>
         </p:txBody>
@@ -15496,8 +16027,8 @@
         </p:nvSpPr>
         <p:spPr>
           <a:xfrm>
-            <a:off x="662940" y="4064508"/>
-            <a:ext cx="777240" cy="960120"/>
+            <a:off x="662940" y="3302508"/>
+            <a:ext cx="777240" cy="579120"/>
           </a:xfrm>
           <a:prstGeom prst="rect">
             <a:avLst/>
@@ -15540,8 +16071,8 @@
         </p:nvSpPr>
         <p:spPr>
           <a:xfrm>
-            <a:off x="594360" y="3995928"/>
-            <a:ext cx="777240" cy="960120"/>
+            <a:off x="594360" y="3233928"/>
+            <a:ext cx="777240" cy="579120"/>
           </a:xfrm>
           <a:prstGeom prst="rect">
             <a:avLst/>
@@ -15584,7 +16115,7 @@
         </p:nvSpPr>
         <p:spPr>
           <a:xfrm>
-            <a:off x="594360" y="4375404"/>
+            <a:off x="594360" y="3422904"/>
             <a:ext cx="777240" cy="274320"/>
           </a:xfrm>
           <a:prstGeom prst="rect">
@@ -15619,8 +16150,8 @@
         </p:nvSpPr>
         <p:spPr>
           <a:xfrm>
-            <a:off x="1714499" y="4064508"/>
-            <a:ext cx="9921240" cy="960120"/>
+            <a:off x="1714499" y="3302508"/>
+            <a:ext cx="9921240" cy="579120"/>
           </a:xfrm>
           <a:prstGeom prst="rect">
             <a:avLst/>
@@ -15663,8 +16194,8 @@
         </p:nvSpPr>
         <p:spPr>
           <a:xfrm>
-            <a:off x="1645919" y="3995928"/>
-            <a:ext cx="9921240" cy="960120"/>
+            <a:off x="1645919" y="3233928"/>
+            <a:ext cx="9921240" cy="579120"/>
           </a:xfrm>
           <a:prstGeom prst="rect">
             <a:avLst/>
@@ -15707,8 +16238,8 @@
         </p:nvSpPr>
         <p:spPr>
           <a:xfrm>
-            <a:off x="1920240" y="4087368"/>
-            <a:ext cx="9372600" cy="777240"/>
+            <a:off x="1920240" y="3325368"/>
+            <a:ext cx="9372600" cy="396239"/>
           </a:xfrm>
           <a:prstGeom prst="rect">
             <a:avLst/>
@@ -15727,13 +16258,763 @@
               </a:lnSpc>
             </a:pPr>
             <a:r>
-              <a:rPr sz="1300">
+              <a:rPr sz="1200">
                 <a:solidFill>
                   <a:srgbClr val="000000"/>
                 </a:solidFill>
                 <a:latin typeface="Calibri"/>
               </a:rPr>
-              <a:t>Reuse the pyramid as a Boolean cutter in the previous study and show at least three parameter settings. Explain face order, normals and closure.</a:t>
+              <a:t>Rebuild it from scratch: an explicit point list and an explicit face list, every point an expression of those parameters rather than a typed coordinate. Nothing collapsed, and it closes.</a:t>
+            </a:r>
+          </a:p>
+        </p:txBody>
+      </p:sp>
+      <p:sp>
+        <p:nvSpPr>
+          <p:cNvPr id="23" name="Rectangle 22"/>
+          <p:cNvSpPr/>
+          <p:nvPr/>
+        </p:nvSpPr>
+        <p:spPr>
+          <a:xfrm>
+            <a:off x="662940" y="4027932"/>
+            <a:ext cx="777240" cy="579120"/>
+          </a:xfrm>
+          <a:prstGeom prst="rect">
+            <a:avLst/>
+          </a:prstGeom>
+          <a:solidFill>
+            <a:srgbClr val="000000"/>
+          </a:solidFill>
+          <a:ln w="6350">
+            <a:solidFill>
+              <a:srgbClr val="000000"/>
+            </a:solidFill>
+          </a:ln>
+          <a:effectLst/>
+        </p:spPr>
+        <p:style>
+          <a:lnRef idx="1">
+            <a:schemeClr val="accent1"/>
+          </a:lnRef>
+          <a:fillRef idx="3">
+            <a:schemeClr val="accent1"/>
+          </a:fillRef>
+          <a:effectRef idx="2">
+            <a:schemeClr val="accent1"/>
+          </a:effectRef>
+          <a:fontRef idx="minor">
+            <a:schemeClr val="lt1"/>
+          </a:fontRef>
+        </p:style>
+        <p:txBody>
+          <a:bodyPr rtlCol="0" anchor="ctr"/>
+          <a:lstStyle/>
+          <a:p/>
+        </p:txBody>
+      </p:sp>
+      <p:sp>
+        <p:nvSpPr>
+          <p:cNvPr id="24" name="Rectangle 23"/>
+          <p:cNvSpPr/>
+          <p:nvPr/>
+        </p:nvSpPr>
+        <p:spPr>
+          <a:xfrm>
+            <a:off x="594360" y="3959352"/>
+            <a:ext cx="777240" cy="579120"/>
+          </a:xfrm>
+          <a:prstGeom prst="rect">
+            <a:avLst/>
+          </a:prstGeom>
+          <a:solidFill>
+            <a:srgbClr val="FF4D8D"/>
+          </a:solidFill>
+          <a:ln w="34925">
+            <a:solidFill>
+              <a:srgbClr val="000000"/>
+            </a:solidFill>
+          </a:ln>
+          <a:effectLst/>
+        </p:spPr>
+        <p:style>
+          <a:lnRef idx="1">
+            <a:schemeClr val="accent1"/>
+          </a:lnRef>
+          <a:fillRef idx="3">
+            <a:schemeClr val="accent1"/>
+          </a:fillRef>
+          <a:effectRef idx="2">
+            <a:schemeClr val="accent1"/>
+          </a:effectRef>
+          <a:fontRef idx="minor">
+            <a:schemeClr val="lt1"/>
+          </a:fontRef>
+        </p:style>
+        <p:txBody>
+          <a:bodyPr rtlCol="0" anchor="ctr"/>
+          <a:lstStyle/>
+          <a:p/>
+        </p:txBody>
+      </p:sp>
+      <p:sp>
+        <p:nvSpPr>
+          <p:cNvPr id="25" name="TextBox 24"/>
+          <p:cNvSpPr txBox="1"/>
+          <p:nvPr/>
+        </p:nvSpPr>
+        <p:spPr>
+          <a:xfrm>
+            <a:off x="594360" y="4148328"/>
+            <a:ext cx="777240" cy="274320"/>
+          </a:xfrm>
+          <a:prstGeom prst="rect">
+            <a:avLst/>
+          </a:prstGeom>
+          <a:noFill/>
+        </p:spPr>
+        <p:txBody>
+          <a:bodyPr wrap="square" lIns="0" rIns="0" tIns="0" bIns="0" anchor="t">
+            <a:spAutoFit/>
+          </a:bodyPr>
+          <a:lstStyle/>
+          <a:p>
+            <a:pPr algn="ctr"/>
+            <a:r>
+              <a:rPr sz="1500" b="1">
+                <a:solidFill>
+                  <a:srgbClr val="000000"/>
+                </a:solidFill>
+                <a:latin typeface="Arial"/>
+              </a:rPr>
+              <a:t>04</a:t>
+            </a:r>
+          </a:p>
+        </p:txBody>
+      </p:sp>
+      <p:sp>
+        <p:nvSpPr>
+          <p:cNvPr id="26" name="Rectangle 25"/>
+          <p:cNvSpPr/>
+          <p:nvPr/>
+        </p:nvSpPr>
+        <p:spPr>
+          <a:xfrm>
+            <a:off x="1714499" y="4027932"/>
+            <a:ext cx="9921240" cy="579120"/>
+          </a:xfrm>
+          <a:prstGeom prst="rect">
+            <a:avLst/>
+          </a:prstGeom>
+          <a:solidFill>
+            <a:srgbClr val="000000"/>
+          </a:solidFill>
+          <a:ln w="6350">
+            <a:solidFill>
+              <a:srgbClr val="000000"/>
+            </a:solidFill>
+          </a:ln>
+          <a:effectLst/>
+        </p:spPr>
+        <p:style>
+          <a:lnRef idx="1">
+            <a:schemeClr val="accent1"/>
+          </a:lnRef>
+          <a:fillRef idx="3">
+            <a:schemeClr val="accent1"/>
+          </a:fillRef>
+          <a:effectRef idx="2">
+            <a:schemeClr val="accent1"/>
+          </a:effectRef>
+          <a:fontRef idx="minor">
+            <a:schemeClr val="lt1"/>
+          </a:fontRef>
+        </p:style>
+        <p:txBody>
+          <a:bodyPr rtlCol="0" anchor="ctr"/>
+          <a:lstStyle/>
+          <a:p/>
+        </p:txBody>
+      </p:sp>
+      <p:sp>
+        <p:nvSpPr>
+          <p:cNvPr id="27" name="Rectangle 26"/>
+          <p:cNvSpPr/>
+          <p:nvPr/>
+        </p:nvSpPr>
+        <p:spPr>
+          <a:xfrm>
+            <a:off x="1645919" y="3959352"/>
+            <a:ext cx="9921240" cy="579120"/>
+          </a:xfrm>
+          <a:prstGeom prst="rect">
+            <a:avLst/>
+          </a:prstGeom>
+          <a:solidFill>
+            <a:srgbClr val="FFFDF7"/>
+          </a:solidFill>
+          <a:ln w="34925">
+            <a:solidFill>
+              <a:srgbClr val="000000"/>
+            </a:solidFill>
+          </a:ln>
+          <a:effectLst/>
+        </p:spPr>
+        <p:style>
+          <a:lnRef idx="1">
+            <a:schemeClr val="accent1"/>
+          </a:lnRef>
+          <a:fillRef idx="3">
+            <a:schemeClr val="accent1"/>
+          </a:fillRef>
+          <a:effectRef idx="2">
+            <a:schemeClr val="accent1"/>
+          </a:effectRef>
+          <a:fontRef idx="minor">
+            <a:schemeClr val="lt1"/>
+          </a:fontRef>
+        </p:style>
+        <p:txBody>
+          <a:bodyPr rtlCol="0" anchor="ctr"/>
+          <a:lstStyle/>
+          <a:p/>
+        </p:txBody>
+      </p:sp>
+      <p:sp>
+        <p:nvSpPr>
+          <p:cNvPr id="28" name="TextBox 27"/>
+          <p:cNvSpPr txBox="1"/>
+          <p:nvPr/>
+        </p:nvSpPr>
+        <p:spPr>
+          <a:xfrm>
+            <a:off x="1920240" y="4050791"/>
+            <a:ext cx="9372600" cy="396239"/>
+          </a:xfrm>
+          <a:prstGeom prst="rect">
+            <a:avLst/>
+          </a:prstGeom>
+          <a:noFill/>
+        </p:spPr>
+        <p:txBody>
+          <a:bodyPr wrap="square" lIns="0" rIns="0" tIns="0" bIns="0" anchor="ctr">
+            <a:spAutoFit/>
+          </a:bodyPr>
+          <a:lstStyle/>
+          <a:p>
+            <a:pPr algn="l">
+              <a:lnSpc>
+                <a:spcPct val="125000"/>
+              </a:lnSpc>
+            </a:pPr>
+            <a:r>
+              <a:rPr sz="1200">
+                <a:solidFill>
+                  <a:srgbClr val="000000"/>
+                </a:solidFill>
+                <a:latin typeface="Calibri"/>
+              </a:rPr>
+              <a:t>State each parameter's working range — where the panel still closes and still tiles — and show it at the low, middle and high end of the one an attractor will drive in P2b.</a:t>
+            </a:r>
+          </a:p>
+        </p:txBody>
+      </p:sp>
+      <p:sp>
+        <p:nvSpPr>
+          <p:cNvPr id="29" name="Rectangle 28"/>
+          <p:cNvSpPr/>
+          <p:nvPr/>
+        </p:nvSpPr>
+        <p:spPr>
+          <a:xfrm>
+            <a:off x="662940" y="4753356"/>
+            <a:ext cx="777240" cy="579120"/>
+          </a:xfrm>
+          <a:prstGeom prst="rect">
+            <a:avLst/>
+          </a:prstGeom>
+          <a:solidFill>
+            <a:srgbClr val="000000"/>
+          </a:solidFill>
+          <a:ln w="6350">
+            <a:solidFill>
+              <a:srgbClr val="000000"/>
+            </a:solidFill>
+          </a:ln>
+          <a:effectLst/>
+        </p:spPr>
+        <p:style>
+          <a:lnRef idx="1">
+            <a:schemeClr val="accent1"/>
+          </a:lnRef>
+          <a:fillRef idx="3">
+            <a:schemeClr val="accent1"/>
+          </a:fillRef>
+          <a:effectRef idx="2">
+            <a:schemeClr val="accent1"/>
+          </a:effectRef>
+          <a:fontRef idx="minor">
+            <a:schemeClr val="lt1"/>
+          </a:fontRef>
+        </p:style>
+        <p:txBody>
+          <a:bodyPr rtlCol="0" anchor="ctr"/>
+          <a:lstStyle/>
+          <a:p/>
+        </p:txBody>
+      </p:sp>
+      <p:sp>
+        <p:nvSpPr>
+          <p:cNvPr id="30" name="Rectangle 29"/>
+          <p:cNvSpPr/>
+          <p:nvPr/>
+        </p:nvSpPr>
+        <p:spPr>
+          <a:xfrm>
+            <a:off x="594360" y="4684776"/>
+            <a:ext cx="777240" cy="579120"/>
+          </a:xfrm>
+          <a:prstGeom prst="rect">
+            <a:avLst/>
+          </a:prstGeom>
+          <a:solidFill>
+            <a:srgbClr val="00D9E1"/>
+          </a:solidFill>
+          <a:ln w="34925">
+            <a:solidFill>
+              <a:srgbClr val="000000"/>
+            </a:solidFill>
+          </a:ln>
+          <a:effectLst/>
+        </p:spPr>
+        <p:style>
+          <a:lnRef idx="1">
+            <a:schemeClr val="accent1"/>
+          </a:lnRef>
+          <a:fillRef idx="3">
+            <a:schemeClr val="accent1"/>
+          </a:fillRef>
+          <a:effectRef idx="2">
+            <a:schemeClr val="accent1"/>
+          </a:effectRef>
+          <a:fontRef idx="minor">
+            <a:schemeClr val="lt1"/>
+          </a:fontRef>
+        </p:style>
+        <p:txBody>
+          <a:bodyPr rtlCol="0" anchor="ctr"/>
+          <a:lstStyle/>
+          <a:p/>
+        </p:txBody>
+      </p:sp>
+      <p:sp>
+        <p:nvSpPr>
+          <p:cNvPr id="31" name="TextBox 30"/>
+          <p:cNvSpPr txBox="1"/>
+          <p:nvPr/>
+        </p:nvSpPr>
+        <p:spPr>
+          <a:xfrm>
+            <a:off x="594360" y="4873752"/>
+            <a:ext cx="777240" cy="274320"/>
+          </a:xfrm>
+          <a:prstGeom prst="rect">
+            <a:avLst/>
+          </a:prstGeom>
+          <a:noFill/>
+        </p:spPr>
+        <p:txBody>
+          <a:bodyPr wrap="square" lIns="0" rIns="0" tIns="0" bIns="0" anchor="t">
+            <a:spAutoFit/>
+          </a:bodyPr>
+          <a:lstStyle/>
+          <a:p>
+            <a:pPr algn="ctr"/>
+            <a:r>
+              <a:rPr sz="1500" b="1">
+                <a:solidFill>
+                  <a:srgbClr val="000000"/>
+                </a:solidFill>
+                <a:latin typeface="Arial"/>
+              </a:rPr>
+              <a:t>05</a:t>
+            </a:r>
+          </a:p>
+        </p:txBody>
+      </p:sp>
+      <p:sp>
+        <p:nvSpPr>
+          <p:cNvPr id="32" name="Rectangle 31"/>
+          <p:cNvSpPr/>
+          <p:nvPr/>
+        </p:nvSpPr>
+        <p:spPr>
+          <a:xfrm>
+            <a:off x="1714499" y="4753356"/>
+            <a:ext cx="9921240" cy="579120"/>
+          </a:xfrm>
+          <a:prstGeom prst="rect">
+            <a:avLst/>
+          </a:prstGeom>
+          <a:solidFill>
+            <a:srgbClr val="000000"/>
+          </a:solidFill>
+          <a:ln w="6350">
+            <a:solidFill>
+              <a:srgbClr val="000000"/>
+            </a:solidFill>
+          </a:ln>
+          <a:effectLst/>
+        </p:spPr>
+        <p:style>
+          <a:lnRef idx="1">
+            <a:schemeClr val="accent1"/>
+          </a:lnRef>
+          <a:fillRef idx="3">
+            <a:schemeClr val="accent1"/>
+          </a:fillRef>
+          <a:effectRef idx="2">
+            <a:schemeClr val="accent1"/>
+          </a:effectRef>
+          <a:fontRef idx="minor">
+            <a:schemeClr val="lt1"/>
+          </a:fontRef>
+        </p:style>
+        <p:txBody>
+          <a:bodyPr rtlCol="0" anchor="ctr"/>
+          <a:lstStyle/>
+          <a:p/>
+        </p:txBody>
+      </p:sp>
+      <p:sp>
+        <p:nvSpPr>
+          <p:cNvPr id="33" name="Rectangle 32"/>
+          <p:cNvSpPr/>
+          <p:nvPr/>
+        </p:nvSpPr>
+        <p:spPr>
+          <a:xfrm>
+            <a:off x="1645919" y="4684776"/>
+            <a:ext cx="9921240" cy="579120"/>
+          </a:xfrm>
+          <a:prstGeom prst="rect">
+            <a:avLst/>
+          </a:prstGeom>
+          <a:solidFill>
+            <a:srgbClr val="FFFDF7"/>
+          </a:solidFill>
+          <a:ln w="34925">
+            <a:solidFill>
+              <a:srgbClr val="000000"/>
+            </a:solidFill>
+          </a:ln>
+          <a:effectLst/>
+        </p:spPr>
+        <p:style>
+          <a:lnRef idx="1">
+            <a:schemeClr val="accent1"/>
+          </a:lnRef>
+          <a:fillRef idx="3">
+            <a:schemeClr val="accent1"/>
+          </a:fillRef>
+          <a:effectRef idx="2">
+            <a:schemeClr val="accent1"/>
+          </a:effectRef>
+          <a:fontRef idx="minor">
+            <a:schemeClr val="lt1"/>
+          </a:fontRef>
+        </p:style>
+        <p:txBody>
+          <a:bodyPr rtlCol="0" anchor="ctr"/>
+          <a:lstStyle/>
+          <a:p/>
+        </p:txBody>
+      </p:sp>
+      <p:sp>
+        <p:nvSpPr>
+          <p:cNvPr id="34" name="TextBox 33"/>
+          <p:cNvSpPr txBox="1"/>
+          <p:nvPr/>
+        </p:nvSpPr>
+        <p:spPr>
+          <a:xfrm>
+            <a:off x="1920240" y="4776215"/>
+            <a:ext cx="9372600" cy="396239"/>
+          </a:xfrm>
+          <a:prstGeom prst="rect">
+            <a:avLst/>
+          </a:prstGeom>
+          <a:noFill/>
+        </p:spPr>
+        <p:txBody>
+          <a:bodyPr wrap="square" lIns="0" rIns="0" tIns="0" bIns="0" anchor="ctr">
+            <a:spAutoFit/>
+          </a:bodyPr>
+          <a:lstStyle/>
+          <a:p>
+            <a:pPr algn="l">
+              <a:lnSpc>
+                <a:spcPct val="125000"/>
+              </a:lnSpc>
+            </a:pPr>
+            <a:r>
+              <a:rPr sz="1200">
+                <a:solidFill>
+                  <a:srgbClr val="000000"/>
+                </a:solidFill>
+                <a:latin typeface="Calibri"/>
+              </a:rPr>
+              <a:t>One 17 × 11 inch sheet, and one image on it: the panel rendered on a ground plane, one material, studio light, no context and no entourage. The object, its structure and nothing else.</a:t>
+            </a:r>
+          </a:p>
+        </p:txBody>
+      </p:sp>
+      <p:sp>
+        <p:nvSpPr>
+          <p:cNvPr id="35" name="Rectangle 34"/>
+          <p:cNvSpPr/>
+          <p:nvPr/>
+        </p:nvSpPr>
+        <p:spPr>
+          <a:xfrm>
+            <a:off x="662940" y="5478780"/>
+            <a:ext cx="777240" cy="579120"/>
+          </a:xfrm>
+          <a:prstGeom prst="rect">
+            <a:avLst/>
+          </a:prstGeom>
+          <a:solidFill>
+            <a:srgbClr val="000000"/>
+          </a:solidFill>
+          <a:ln w="6350">
+            <a:solidFill>
+              <a:srgbClr val="000000"/>
+            </a:solidFill>
+          </a:ln>
+          <a:effectLst/>
+        </p:spPr>
+        <p:style>
+          <a:lnRef idx="1">
+            <a:schemeClr val="accent1"/>
+          </a:lnRef>
+          <a:fillRef idx="3">
+            <a:schemeClr val="accent1"/>
+          </a:fillRef>
+          <a:effectRef idx="2">
+            <a:schemeClr val="accent1"/>
+          </a:effectRef>
+          <a:fontRef idx="minor">
+            <a:schemeClr val="lt1"/>
+          </a:fontRef>
+        </p:style>
+        <p:txBody>
+          <a:bodyPr rtlCol="0" anchor="ctr"/>
+          <a:lstStyle/>
+          <a:p/>
+        </p:txBody>
+      </p:sp>
+      <p:sp>
+        <p:nvSpPr>
+          <p:cNvPr id="36" name="Rectangle 35"/>
+          <p:cNvSpPr/>
+          <p:nvPr/>
+        </p:nvSpPr>
+        <p:spPr>
+          <a:xfrm>
+            <a:off x="594360" y="5410199"/>
+            <a:ext cx="777240" cy="579120"/>
+          </a:xfrm>
+          <a:prstGeom prst="rect">
+            <a:avLst/>
+          </a:prstGeom>
+          <a:solidFill>
+            <a:srgbClr val="C6F035"/>
+          </a:solidFill>
+          <a:ln w="34925">
+            <a:solidFill>
+              <a:srgbClr val="000000"/>
+            </a:solidFill>
+          </a:ln>
+          <a:effectLst/>
+        </p:spPr>
+        <p:style>
+          <a:lnRef idx="1">
+            <a:schemeClr val="accent1"/>
+          </a:lnRef>
+          <a:fillRef idx="3">
+            <a:schemeClr val="accent1"/>
+          </a:fillRef>
+          <a:effectRef idx="2">
+            <a:schemeClr val="accent1"/>
+          </a:effectRef>
+          <a:fontRef idx="minor">
+            <a:schemeClr val="lt1"/>
+          </a:fontRef>
+        </p:style>
+        <p:txBody>
+          <a:bodyPr rtlCol="0" anchor="ctr"/>
+          <a:lstStyle/>
+          <a:p/>
+        </p:txBody>
+      </p:sp>
+      <p:sp>
+        <p:nvSpPr>
+          <p:cNvPr id="37" name="TextBox 36"/>
+          <p:cNvSpPr txBox="1"/>
+          <p:nvPr/>
+        </p:nvSpPr>
+        <p:spPr>
+          <a:xfrm>
+            <a:off x="594360" y="5599176"/>
+            <a:ext cx="777240" cy="274320"/>
+          </a:xfrm>
+          <a:prstGeom prst="rect">
+            <a:avLst/>
+          </a:prstGeom>
+          <a:noFill/>
+        </p:spPr>
+        <p:txBody>
+          <a:bodyPr wrap="square" lIns="0" rIns="0" tIns="0" bIns="0" anchor="t">
+            <a:spAutoFit/>
+          </a:bodyPr>
+          <a:lstStyle/>
+          <a:p>
+            <a:pPr algn="ctr"/>
+            <a:r>
+              <a:rPr sz="1500" b="1">
+                <a:solidFill>
+                  <a:srgbClr val="000000"/>
+                </a:solidFill>
+                <a:latin typeface="Arial"/>
+              </a:rPr>
+              <a:t>06</a:t>
+            </a:r>
+          </a:p>
+        </p:txBody>
+      </p:sp>
+      <p:sp>
+        <p:nvSpPr>
+          <p:cNvPr id="38" name="Rectangle 37"/>
+          <p:cNvSpPr/>
+          <p:nvPr/>
+        </p:nvSpPr>
+        <p:spPr>
+          <a:xfrm>
+            <a:off x="1714499" y="5478780"/>
+            <a:ext cx="9921240" cy="579120"/>
+          </a:xfrm>
+          <a:prstGeom prst="rect">
+            <a:avLst/>
+          </a:prstGeom>
+          <a:solidFill>
+            <a:srgbClr val="000000"/>
+          </a:solidFill>
+          <a:ln w="6350">
+            <a:solidFill>
+              <a:srgbClr val="000000"/>
+            </a:solidFill>
+          </a:ln>
+          <a:effectLst/>
+        </p:spPr>
+        <p:style>
+          <a:lnRef idx="1">
+            <a:schemeClr val="accent1"/>
+          </a:lnRef>
+          <a:fillRef idx="3">
+            <a:schemeClr val="accent1"/>
+          </a:fillRef>
+          <a:effectRef idx="2">
+            <a:schemeClr val="accent1"/>
+          </a:effectRef>
+          <a:fontRef idx="minor">
+            <a:schemeClr val="lt1"/>
+          </a:fontRef>
+        </p:style>
+        <p:txBody>
+          <a:bodyPr rtlCol="0" anchor="ctr"/>
+          <a:lstStyle/>
+          <a:p/>
+        </p:txBody>
+      </p:sp>
+      <p:sp>
+        <p:nvSpPr>
+          <p:cNvPr id="39" name="Rectangle 38"/>
+          <p:cNvSpPr/>
+          <p:nvPr/>
+        </p:nvSpPr>
+        <p:spPr>
+          <a:xfrm>
+            <a:off x="1645919" y="5410199"/>
+            <a:ext cx="9921240" cy="579120"/>
+          </a:xfrm>
+          <a:prstGeom prst="rect">
+            <a:avLst/>
+          </a:prstGeom>
+          <a:solidFill>
+            <a:srgbClr val="FFFDF7"/>
+          </a:solidFill>
+          <a:ln w="34925">
+            <a:solidFill>
+              <a:srgbClr val="000000"/>
+            </a:solidFill>
+          </a:ln>
+          <a:effectLst/>
+        </p:spPr>
+        <p:style>
+          <a:lnRef idx="1">
+            <a:schemeClr val="accent1"/>
+          </a:lnRef>
+          <a:fillRef idx="3">
+            <a:schemeClr val="accent1"/>
+          </a:fillRef>
+          <a:effectRef idx="2">
+            <a:schemeClr val="accent1"/>
+          </a:effectRef>
+          <a:fontRef idx="minor">
+            <a:schemeClr val="lt1"/>
+          </a:fontRef>
+        </p:style>
+        <p:txBody>
+          <a:bodyPr rtlCol="0" anchor="ctr"/>
+          <a:lstStyle/>
+          <a:p/>
+        </p:txBody>
+      </p:sp>
+      <p:sp>
+        <p:nvSpPr>
+          <p:cNvPr id="40" name="TextBox 39"/>
+          <p:cNvSpPr txBox="1"/>
+          <p:nvPr/>
+        </p:nvSpPr>
+        <p:spPr>
+          <a:xfrm>
+            <a:off x="1920240" y="5501639"/>
+            <a:ext cx="9372600" cy="396239"/>
+          </a:xfrm>
+          <a:prstGeom prst="rect">
+            <a:avLst/>
+          </a:prstGeom>
+          <a:noFill/>
+        </p:spPr>
+        <p:txBody>
+          <a:bodyPr wrap="square" lIns="0" rIns="0" tIns="0" bIns="0" anchor="ctr">
+            <a:spAutoFit/>
+          </a:bodyPr>
+          <a:lstStyle/>
+          <a:p>
+            <a:pPr algn="l">
+              <a:lnSpc>
+                <a:spcPct val="125000"/>
+              </a:lnSpc>
+            </a:pPr>
+            <a:r>
+              <a:rPr sz="1200">
+                <a:solidFill>
+                  <a:srgbClr val="000000"/>
+                </a:solidFill>
+                <a:latin typeface="Calibri"/>
+              </a:rPr>
+              <a:t>Print the point list, the face list and the parameter table beside the render, and annotate the vertex order of one face. Explain normals, closure, and what breaks when a face is wound backwards.</a:t>
             </a:r>
           </a:p>
         </p:txBody>

--- a/slides/ARC3133_Class03.pptx
+++ b/slides/ARC3133_Class03.pptx
@@ -4761,7 +4761,7 @@
                 </a:solidFill>
                 <a:latin typeface="Calibri"/>
               </a:rPr>
-              <a:t>Orientation and a photograph. Brought to the midterm with the print.</a:t>
+              <a:t>Orientation and a photograph. Handed in with the print in Week 10.</a:t>
             </a:r>
           </a:p>
         </p:txBody>
@@ -5366,7 +5366,7 @@
                 </a:solidFill>
                 <a:latin typeface="Calibri"/>
               </a:rPr>
-              <a:t>Bring the print to midterm with one process sheet showing orientation and a photograph.</a:t>
+              <a:t>Hand in the print in Week 10 with one process sheet showing orientation and a photograph.</a:t>
             </a:r>
           </a:p>
         </p:txBody>
@@ -8122,7 +8122,7 @@
                 </a:solidFill>
                 <a:latin typeface="Calibri"/>
               </a:rPr>
-              <a:t>P2b print checkpoint WEEK 6 — Sep 29: Check geometry, units, orientation and the sliced preview before queueing. P2b is due at the midterm, WEEK 10 — Oct 27.</a:t>
+              <a:t>P2b print checkpoint WEEK 6 — Sep 29: Check geometry, units, orientation and the sliced preview before queueing. P2b is due at the mid-semester deadline, WEEK 10 — Oct 27.</a:t>
             </a:r>
           </a:p>
         </p:txBody>
